--- a/assets/TCS349/Unit-2/Lecture9_Security_Privacy_Balance_Review.pptx
+++ b/assets/TCS349/Unit-2/Lecture9_Security_Privacy_Balance_Review.pptx
@@ -5,7 +5,7 @@
     <p:sldMasterId id="2147483648" r:id="rId1"/>
   </p:sldMasterIdLst>
   <p:notesMasterIdLst>
-    <p:notesMasterId r:id="rId11"/>
+    <p:notesMasterId r:id="rId10"/>
   </p:notesMasterIdLst>
   <p:sldIdLst>
     <p:sldId id="256" r:id="rId2"/>
@@ -16,7 +16,6 @@
     <p:sldId id="261" r:id="rId7"/>
     <p:sldId id="262" r:id="rId8"/>
     <p:sldId id="263" r:id="rId9"/>
-    <p:sldId id="264" r:id="rId10"/>
   </p:sldIdLst>
   <p:sldSz cx="12192000" cy="6858000"/>
   <p:notesSz cx="6858000" cy="12192000"/>
@@ -899,90 +898,6 @@
             <a:fld id="{F7021451-1387-4CA6-816F-3879F97B5CBC}" type="slidenum">
               <a:rPr lang="en-US"/>
               <a:t>8</a:t>
-            </a:fld>
-            <a:endParaRPr lang="en-US"/>
-          </a:p>
-        </p:txBody>
-      </p:sp>
-    </p:spTree>
-    <p:extLst>
-      <p:ext uri="{BB962C8B-B14F-4D97-AF65-F5344CB8AC3E}">
-        <p14:creationId xmlns:p14="http://schemas.microsoft.com/office/powerpoint/2010/main" val="1024086991"/>
-      </p:ext>
-    </p:extLst>
-  </p:cSld>
-  <p:clrMapOvr>
-    <a:masterClrMapping/>
-  </p:clrMapOvr>
-</p:notes>
-</file>
-
-<file path=ppt/notesSlides/notesSlide9.xml><?xml version="1.0" encoding="utf-8"?>
-<p:notes xmlns:a="http://schemas.openxmlformats.org/drawingml/2006/main" xmlns:r="http://schemas.openxmlformats.org/officeDocument/2006/relationships" xmlns:p="http://schemas.openxmlformats.org/presentationml/2006/main">
-  <p:cSld>
-    <p:spTree>
-      <p:nvGrpSpPr>
-        <p:cNvPr id="1" name=""/>
-        <p:cNvGrpSpPr/>
-        <p:nvPr/>
-      </p:nvGrpSpPr>
-      <p:grpSpPr>
-        <a:xfrm>
-          <a:off x="0" y="0"/>
-          <a:ext cx="0" cy="0"/>
-          <a:chOff x="0" y="0"/>
-          <a:chExt cx="0" cy="0"/>
-        </a:xfrm>
-      </p:grpSpPr>
-      <p:sp>
-        <p:nvSpPr>
-          <p:cNvPr id="2" name="Slide Image Placeholder 1"/>
-          <p:cNvSpPr>
-            <a:spLocks noGrp="1" noRot="1" noChangeAspect="1"/>
-          </p:cNvSpPr>
-          <p:nvPr>
-            <p:ph type="sldImg"/>
-          </p:nvPr>
-        </p:nvSpPr>
-        <p:spPr/>
-      </p:sp>
-      <p:sp>
-        <p:nvSpPr>
-          <p:cNvPr id="3" name="Notes Placeholder 2"/>
-          <p:cNvSpPr>
-            <a:spLocks noGrp="1"/>
-          </p:cNvSpPr>
-          <p:nvPr>
-            <p:ph type="body" idx="1"/>
-          </p:nvPr>
-        </p:nvSpPr>
-        <p:spPr/>
-        <p:txBody>
-          <a:bodyPr/>
-          <a:lstStyle/>
-          <a:p>
-            <a:endParaRPr lang="en-US" dirty="0"/>
-          </a:p>
-        </p:txBody>
-      </p:sp>
-      <p:sp>
-        <p:nvSpPr>
-          <p:cNvPr id="4" name="Slide Number Placeholder 3"/>
-          <p:cNvSpPr>
-            <a:spLocks noGrp="1"/>
-          </p:cNvSpPr>
-          <p:nvPr>
-            <p:ph type="sldNum" sz="quarter" idx="10"/>
-          </p:nvPr>
-        </p:nvSpPr>
-        <p:spPr/>
-        <p:txBody>
-          <a:bodyPr/>
-          <a:lstStyle/>
-          <a:p>
-            <a:fld id="{F7021451-1387-4CA6-816F-3879F97B5CBC}" type="slidenum">
-              <a:rPr lang="en-US"/>
-              <a:t>9</a:t>
             </a:fld>
             <a:endParaRPr lang="en-US"/>
           </a:p>
@@ -5114,367 +5029,6 @@
                 <a:cs typeface="Times New Roman" pitchFamily="34" charset="-120"/>
               </a:rPr>
               <a:t>8</a:t>
-            </a:r>
-            <a:endParaRPr lang="en-US" sz="1200" dirty="0"/>
-          </a:p>
-        </p:txBody>
-      </p:sp>
-    </p:spTree>
-  </p:cSld>
-  <p:clrMapOvr>
-    <a:masterClrMapping/>
-  </p:clrMapOvr>
-</p:sld>
-</file>
-
-<file path=ppt/slides/slide9.xml><?xml version="1.0" encoding="utf-8"?>
-<p:sld xmlns:a="http://schemas.openxmlformats.org/drawingml/2006/main" xmlns:r="http://schemas.openxmlformats.org/officeDocument/2006/relationships" xmlns:p="http://schemas.openxmlformats.org/presentationml/2006/main">
-  <p:cSld name="Slide 9">
-    <p:bg>
-      <p:bgPr>
-        <a:solidFill>
-          <a:srgbClr val="FFFFFF"/>
-        </a:solidFill>
-        <a:effectLst/>
-      </p:bgPr>
-    </p:bg>
-    <p:spTree>
-      <p:nvGrpSpPr>
-        <p:cNvPr id="1" name=""/>
-        <p:cNvGrpSpPr/>
-        <p:nvPr/>
-      </p:nvGrpSpPr>
-      <p:grpSpPr>
-        <a:xfrm>
-          <a:off x="0" y="0"/>
-          <a:ext cx="0" cy="0"/>
-          <a:chOff x="0" y="0"/>
-          <a:chExt cx="0" cy="0"/>
-        </a:xfrm>
-      </p:grpSpPr>
-      <p:sp>
-        <p:nvSpPr>
-          <p:cNvPr id="2" name="Shape 0"/>
-          <p:cNvSpPr/>
-          <p:nvPr/>
-        </p:nvSpPr>
-        <p:spPr>
-          <a:xfrm>
-            <a:off x="0" y="0"/>
-            <a:ext cx="12191695" cy="502920"/>
-          </a:xfrm>
-          <a:prstGeom prst="rect">
-            <a:avLst/>
-          </a:prstGeom>
-          <a:solidFill>
-            <a:srgbClr val="F8FBFF"/>
-          </a:solidFill>
-          <a:ln w="12700">
-            <a:solidFill>
-              <a:srgbClr val="F8FBFF"/>
-            </a:solidFill>
-            <a:prstDash val="solid"/>
-          </a:ln>
-        </p:spPr>
-        <p:txBody>
-          <a:bodyPr/>
-          <a:lstStyle/>
-          <a:p>
-            <a:endParaRPr lang="en-US"/>
-          </a:p>
-        </p:txBody>
-      </p:sp>
-      <p:sp>
-        <p:nvSpPr>
-          <p:cNvPr id="3" name="Shape 1"/>
-          <p:cNvSpPr/>
-          <p:nvPr/>
-        </p:nvSpPr>
-        <p:spPr>
-          <a:xfrm>
-            <a:off x="0" y="475488"/>
-            <a:ext cx="12191695" cy="27432"/>
-          </a:xfrm>
-          <a:prstGeom prst="rect">
-            <a:avLst/>
-          </a:prstGeom>
-          <a:solidFill>
-            <a:srgbClr val="2E75B6"/>
-          </a:solidFill>
-          <a:ln w="12700">
-            <a:solidFill>
-              <a:srgbClr val="2E75B6"/>
-            </a:solidFill>
-            <a:prstDash val="solid"/>
-          </a:ln>
-        </p:spPr>
-        <p:txBody>
-          <a:bodyPr/>
-          <a:lstStyle/>
-          <a:p>
-            <a:endParaRPr lang="en-US"/>
-          </a:p>
-        </p:txBody>
-      </p:sp>
-      <p:sp>
-        <p:nvSpPr>
-          <p:cNvPr id="4" name="Text 2"/>
-          <p:cNvSpPr/>
-          <p:nvPr/>
-        </p:nvSpPr>
-        <p:spPr>
-          <a:xfrm>
-            <a:off x="365760" y="73152"/>
-            <a:ext cx="6400800" cy="274320"/>
-          </a:xfrm>
-          <a:prstGeom prst="rect">
-            <a:avLst/>
-          </a:prstGeom>
-          <a:noFill/>
-          <a:ln/>
-        </p:spPr>
-        <p:txBody>
-          <a:bodyPr wrap="square" lIns="0" tIns="0" rIns="0" bIns="0" rtlCol="0" anchor="ctr"/>
-          <a:lstStyle/>
-          <a:p>
-            <a:pPr marL="0" indent="0">
-              <a:buNone/>
-            </a:pPr>
-            <a:r>
-              <a:rPr lang="en-US" sz="1800" b="1" dirty="0">
-                <a:solidFill>
-                  <a:srgbClr val="1F4E79"/>
-                </a:solidFill>
-                <a:latin typeface="Times New Roman" pitchFamily="34" charset="0"/>
-                <a:ea typeface="Times New Roman" pitchFamily="34" charset="-122"/>
-                <a:cs typeface="Times New Roman" pitchFamily="34" charset="-120"/>
-              </a:rPr>
-              <a:t>TCS349: Responsible and Explainable AI</a:t>
-            </a:r>
-            <a:endParaRPr lang="en-US" sz="1800" dirty="0"/>
-          </a:p>
-        </p:txBody>
-      </p:sp>
-      <p:sp>
-        <p:nvSpPr>
-          <p:cNvPr id="5" name="Text 3"/>
-          <p:cNvSpPr/>
-          <p:nvPr/>
-        </p:nvSpPr>
-        <p:spPr>
-          <a:xfrm>
-            <a:off x="8321040" y="82296"/>
-            <a:ext cx="3383280" cy="274320"/>
-          </a:xfrm>
-          <a:prstGeom prst="rect">
-            <a:avLst/>
-          </a:prstGeom>
-          <a:noFill/>
-          <a:ln/>
-        </p:spPr>
-        <p:txBody>
-          <a:bodyPr wrap="square" lIns="0" tIns="0" rIns="0" bIns="0" rtlCol="0" anchor="ctr"/>
-          <a:lstStyle/>
-          <a:p>
-            <a:pPr marL="0" indent="0" algn="r">
-              <a:buNone/>
-            </a:pPr>
-            <a:r>
-              <a:rPr lang="en-US" sz="1600" b="1" dirty="0">
-                <a:solidFill>
-                  <a:srgbClr val="1F4E79"/>
-                </a:solidFill>
-                <a:latin typeface="Times New Roman" pitchFamily="34" charset="0"/>
-                <a:ea typeface="Times New Roman" pitchFamily="34" charset="-122"/>
-                <a:cs typeface="Times New Roman" pitchFamily="34" charset="-120"/>
-              </a:rPr>
-              <a:t>Unit 2 | Lecture 9</a:t>
-            </a:r>
-            <a:endParaRPr lang="en-US" sz="1600" dirty="0"/>
-          </a:p>
-        </p:txBody>
-      </p:sp>
-      <p:sp>
-        <p:nvSpPr>
-          <p:cNvPr id="6" name="Text 4"/>
-          <p:cNvSpPr/>
-          <p:nvPr/>
-        </p:nvSpPr>
-        <p:spPr>
-          <a:xfrm>
-            <a:off x="502920" y="640080"/>
-            <a:ext cx="11155680" cy="640080"/>
-          </a:xfrm>
-          <a:prstGeom prst="rect">
-            <a:avLst/>
-          </a:prstGeom>
-          <a:noFill/>
-          <a:ln/>
-        </p:spPr>
-        <p:txBody>
-          <a:bodyPr wrap="square" lIns="0" tIns="0" rIns="0" bIns="0" rtlCol="0" anchor="ctr"/>
-          <a:lstStyle/>
-          <a:p>
-            <a:pPr marL="0" indent="0">
-              <a:buNone/>
-            </a:pPr>
-            <a:r>
-              <a:rPr lang="en-US" sz="2300" b="1" dirty="0">
-                <a:solidFill>
-                  <a:srgbClr val="1F4E79"/>
-                </a:solidFill>
-                <a:latin typeface="Times New Roman" pitchFamily="34" charset="0"/>
-                <a:ea typeface="Times New Roman" pitchFamily="34" charset="-122"/>
-                <a:cs typeface="Times New Roman" pitchFamily="34" charset="-120"/>
-              </a:rPr>
-              <a:t>8. Unit II Review - Key Concepts</a:t>
-            </a:r>
-            <a:endParaRPr lang="en-US" sz="2300" dirty="0"/>
-          </a:p>
-        </p:txBody>
-      </p:sp>
-      <p:sp>
-        <p:nvSpPr>
-          <p:cNvPr id="7" name="Text 5"/>
-          <p:cNvSpPr/>
-          <p:nvPr/>
-        </p:nvSpPr>
-        <p:spPr>
-          <a:xfrm>
-            <a:off x="594360" y="1417320"/>
-            <a:ext cx="10972800" cy="4846320"/>
-          </a:xfrm>
-          <a:prstGeom prst="rect">
-            <a:avLst/>
-          </a:prstGeom>
-          <a:noFill/>
-          <a:ln/>
-        </p:spPr>
-        <p:txBody>
-          <a:bodyPr wrap="square" lIns="50800" tIns="50800" rIns="50800" bIns="50800" rtlCol="0" anchor="t"/>
-          <a:lstStyle/>
-          <a:p>
-            <a:pPr marL="0" indent="0">
-              <a:buNone/>
-            </a:pPr>
-            <a:r>
-              <a:rPr lang="en-US" sz="1800" dirty="0">
-                <a:solidFill>
-                  <a:srgbClr val="191919"/>
-                </a:solidFill>
-                <a:latin typeface="Times New Roman" pitchFamily="34" charset="0"/>
-                <a:ea typeface="Times New Roman" pitchFamily="34" charset="-122"/>
-                <a:cs typeface="Times New Roman" pitchFamily="34" charset="-120"/>
-              </a:rPr>
-              <a:t>Transparency: making an AI system's data, logic and limitations understandable to relevant stakeholders.</a:t>
-            </a:r>
-            <a:endParaRPr lang="en-US" sz="1800" dirty="0"/>
-          </a:p>
-          <a:p>
-            <a:pPr marL="0" indent="0">
-              <a:buNone/>
-            </a:pPr>
-            <a:endParaRPr lang="en-US" sz="1800" dirty="0"/>
-          </a:p>
-          <a:p>
-            <a:pPr marL="0" indent="0">
-              <a:buNone/>
-            </a:pPr>
-            <a:r>
-              <a:rPr lang="en-US" sz="1800" dirty="0">
-                <a:solidFill>
-                  <a:srgbClr val="191919"/>
-                </a:solidFill>
-                <a:latin typeface="Times New Roman" pitchFamily="34" charset="0"/>
-                <a:ea typeface="Times New Roman" pitchFamily="34" charset="-122"/>
-                <a:cs typeface="Times New Roman" pitchFamily="34" charset="-120"/>
-              </a:rPr>
-              <a:t>Accountability: assigning clear responsibility, human oversight and escalation paths for a system's decisions.</a:t>
-            </a:r>
-            <a:endParaRPr lang="en-US" sz="1800" dirty="0"/>
-          </a:p>
-          <a:p>
-            <a:pPr marL="0" indent="0">
-              <a:buNone/>
-            </a:pPr>
-            <a:endParaRPr lang="en-US" sz="1800" dirty="0"/>
-          </a:p>
-          <a:p>
-            <a:pPr marL="0" indent="0">
-              <a:buNone/>
-            </a:pPr>
-            <a:r>
-              <a:rPr lang="en-US" sz="1800" dirty="0">
-                <a:solidFill>
-                  <a:srgbClr val="191919"/>
-                </a:solidFill>
-                <a:latin typeface="Times New Roman" pitchFamily="34" charset="0"/>
-                <a:ea typeface="Times New Roman" pitchFamily="34" charset="-122"/>
-                <a:cs typeface="Times New Roman" pitchFamily="34" charset="-120"/>
-              </a:rPr>
-              <a:t>Surveillance: AI techniques - facial recognition, video analytics, behavioural monitoring - that observe people at scale, each with distinct risks.</a:t>
-            </a:r>
-            <a:endParaRPr lang="en-US" sz="1800" dirty="0"/>
-          </a:p>
-          <a:p>
-            <a:pPr marL="0" indent="0">
-              <a:buNone/>
-            </a:pPr>
-            <a:endParaRPr lang="en-US" sz="1800" dirty="0"/>
-          </a:p>
-          <a:p>
-            <a:pPr marL="0" indent="0">
-              <a:buNone/>
-            </a:pPr>
-            <a:r>
-              <a:rPr lang="en-US" sz="1800" dirty="0">
-                <a:solidFill>
-                  <a:srgbClr val="191919"/>
-                </a:solidFill>
-                <a:latin typeface="Times New Roman" pitchFamily="34" charset="0"/>
-                <a:ea typeface="Times New Roman" pitchFamily="34" charset="-122"/>
-                <a:cs typeface="Times New Roman" pitchFamily="34" charset="-120"/>
-              </a:rPr>
-              <a:t>Privacy: protecting personal data through consent, purpose limitation, minimisation, anonymisation and access control.</a:t>
-            </a:r>
-            <a:endParaRPr lang="en-US" sz="1800" dirty="0"/>
-          </a:p>
-        </p:txBody>
-      </p:sp>
-      <p:sp>
-        <p:nvSpPr>
-          <p:cNvPr id="8" name="Text 6"/>
-          <p:cNvSpPr/>
-          <p:nvPr/>
-        </p:nvSpPr>
-        <p:spPr>
-          <a:xfrm>
-            <a:off x="11430000" y="6446520"/>
-            <a:ext cx="365760" cy="182880"/>
-          </a:xfrm>
-          <a:prstGeom prst="rect">
-            <a:avLst/>
-          </a:prstGeom>
-          <a:noFill/>
-          <a:ln/>
-        </p:spPr>
-        <p:txBody>
-          <a:bodyPr wrap="square" lIns="0" tIns="0" rIns="0" bIns="0" rtlCol="0" anchor="ctr"/>
-          <a:lstStyle/>
-          <a:p>
-            <a:pPr marL="0" indent="0" algn="ctr">
-              <a:buNone/>
-            </a:pPr>
-            <a:r>
-              <a:rPr lang="en-US" sz="1200" dirty="0">
-                <a:solidFill>
-                  <a:srgbClr val="595959"/>
-                </a:solidFill>
-                <a:latin typeface="Times New Roman" pitchFamily="34" charset="0"/>
-                <a:ea typeface="Times New Roman" pitchFamily="34" charset="-122"/>
-                <a:cs typeface="Times New Roman" pitchFamily="34" charset="-120"/>
-              </a:rPr>
-              <a:t>9</a:t>
             </a:r>
             <a:endParaRPr lang="en-US" sz="1200" dirty="0"/>
           </a:p>
